--- a/assets/figures-editable/c3-c4/c4-e05.pptx
+++ b/assets/figures-editable/c3-c4/c4-e05.pptx
@@ -3104,8 +3104,8 @@
         </p:nvSpPr>
         <p:spPr>
           <a:xfrm>
-            <a:off x="274320" y="137160"/>
-            <a:ext cx="11612880" cy="365760"/>
+            <a:off x="274320" y="118872"/>
+            <a:ext cx="11612880" cy="340105"/>
           </a:xfrm>
           <a:prstGeom prst="rect">
             <a:avLst/>
@@ -3114,7 +3114,7 @@
           <a:effectLst/>
         </p:spPr>
         <p:txBody>
-          <a:bodyPr wrap="square" lIns="27432" rIns="27432" tIns="18288" bIns="18288" anchor="ctr">
+          <a:bodyPr wrap="none" lIns="18288" rIns="18288" tIns="18288" bIns="18288" anchor="t">
             <a:spAutoFit/>
           </a:bodyPr>
           <a:lstStyle/>
@@ -3125,7 +3125,7 @@
               </a:spcAft>
             </a:pPr>
             <a:r>
-              <a:rPr sz="2100" b="0" i="0">
+              <a:rPr sz="1900" b="1" i="0">
                 <a:solidFill>
                   <a:srgbClr val="8EDBD4"/>
                 </a:solidFill>
@@ -3138,19 +3138,402 @@
       </p:sp>
       <p:sp>
         <p:nvSpPr>
-          <p:cNvPr id="3" name="C4-E05 rect 1" descr="sci-ppt:o001"/>
-          <p:cNvSpPr/>
+          <p:cNvPr id="3" name="C4-E05 text 1" descr="sci-ppt:o001"/>
+          <p:cNvSpPr txBox="1"/>
           <p:nvPr/>
         </p:nvSpPr>
         <p:spPr>
           <a:xfrm>
-            <a:off x="1188720" y="1188720"/>
-            <a:ext cx="6858000" cy="2148840"/>
+            <a:off x="457200" y="914400"/>
+            <a:ext cx="11247120" cy="254889"/>
           </a:xfrm>
           <a:prstGeom prst="rect">
             <a:avLst/>
           </a:prstGeom>
           <a:noFill/>
+          <a:effectLst/>
+        </p:spPr>
+        <p:txBody>
+          <a:bodyPr wrap="none" lIns="18288" rIns="18288" tIns="18288" bIns="18288" anchor="t">
+            <a:spAutoFit/>
+          </a:bodyPr>
+          <a:lstStyle/>
+          <a:p>
+            <a:pPr algn="l">
+              <a:spcAft>
+                <a:spcPts val="0"/>
+              </a:spcAft>
+            </a:pPr>
+            <a:r>
+              <a:rPr sz="1350" b="1" i="0">
+                <a:solidFill>
+                  <a:srgbClr val="8EDBD4"/>
+                </a:solidFill>
+                <a:latin typeface="Arial"/>
+              </a:rPr>
+              <a:t>With a fixed clamp, the boundary terms drop and one operator is left</a:t>
+            </a:r>
+          </a:p>
+        </p:txBody>
+      </p:sp>
+      <p:sp>
+        <p:nvSpPr>
+          <p:cNvPr id="4" name="C4-E05 round_rect 2" descr="sci-ppt:o002"/>
+          <p:cNvSpPr/>
+          <p:nvPr/>
+        </p:nvSpPr>
+        <p:spPr>
+          <a:xfrm>
+            <a:off x="457200" y="1371600"/>
+            <a:ext cx="5486400" cy="2286000"/>
+          </a:xfrm>
+          <a:prstGeom prst="roundRect">
+            <a:avLst/>
+          </a:prstGeom>
+          <a:solidFill>
+            <a:srgbClr val="213E4B"/>
+          </a:solidFill>
+          <a:ln w="20320">
+            <a:solidFill>
+              <a:srgbClr val="F2B880"/>
+            </a:solidFill>
+          </a:ln>
+          <a:effectLst/>
+        </p:spPr>
+        <p:txBody>
+          <a:bodyPr rtlCol="0" anchor="ctr"/>
+          <a:lstStyle/>
+          <a:p>
+            <a:pPr algn="ctr"/>
+          </a:p>
+        </p:txBody>
+      </p:sp>
+      <p:sp>
+        <p:nvSpPr>
+          <p:cNvPr id="5" name="C4-E05 text 3" descr="sci-ppt:o003"/>
+          <p:cNvSpPr txBox="1"/>
+          <p:nvPr/>
+        </p:nvSpPr>
+        <p:spPr>
+          <a:xfrm>
+            <a:off x="566928" y="1426464"/>
+            <a:ext cx="5266944" cy="254889"/>
+          </a:xfrm>
+          <a:prstGeom prst="rect">
+            <a:avLst/>
+          </a:prstGeom>
+          <a:noFill/>
+          <a:effectLst/>
+        </p:spPr>
+        <p:txBody>
+          <a:bodyPr wrap="none" lIns="18288" rIns="18288" tIns="18288" bIns="18288" anchor="t">
+            <a:spAutoFit/>
+          </a:bodyPr>
+          <a:lstStyle/>
+          <a:p>
+            <a:pPr algn="l">
+              <a:spcAft>
+                <a:spcPts val="0"/>
+              </a:spcAft>
+            </a:pPr>
+            <a:r>
+              <a:rPr sz="1350" b="1" i="0">
+                <a:solidFill>
+                  <a:srgbClr val="F2B880"/>
+                </a:solidFill>
+                <a:latin typeface="Arial"/>
+              </a:rPr>
+              <a:t>Bending variation</a:t>
+            </a:r>
+          </a:p>
+        </p:txBody>
+      </p:sp>
+      <p:sp>
+        <p:nvSpPr>
+          <p:cNvPr id="6" name="C4-E05 text 4" descr="sci-ppt:o004"/>
+          <p:cNvSpPr txBox="1"/>
+          <p:nvPr/>
+        </p:nvSpPr>
+        <p:spPr>
+          <a:xfrm>
+            <a:off x="594360" y="1828800"/>
+            <a:ext cx="5212080" cy="239395"/>
+          </a:xfrm>
+          <a:prstGeom prst="rect">
+            <a:avLst/>
+          </a:prstGeom>
+          <a:noFill/>
+          <a:effectLst/>
+        </p:spPr>
+        <p:txBody>
+          <a:bodyPr wrap="none" lIns="18288" rIns="18288" tIns="18288" bIns="18288" anchor="t">
+            <a:spAutoFit/>
+          </a:bodyPr>
+          <a:lstStyle/>
+          <a:p>
+            <a:pPr algn="l">
+              <a:spcAft>
+                <a:spcPts val="0"/>
+              </a:spcAft>
+            </a:pPr>
+            <a:r>
+              <a:rPr sz="1250" b="1" i="0">
+                <a:solidFill>
+                  <a:srgbClr val="E7F0F3"/>
+                </a:solidFill>
+                <a:latin typeface="Arial"/>
+              </a:rPr>
+              <a:t>coefficient of w_xxyy:  2ν_f + 2(1 − ν_f) = 2</a:t>
+            </a:r>
+          </a:p>
+        </p:txBody>
+      </p:sp>
+      <p:sp>
+        <p:nvSpPr>
+          <p:cNvPr id="7" name="C4-E05 text 5" descr="sci-ppt:o005"/>
+          <p:cNvSpPr txBox="1"/>
+          <p:nvPr/>
+        </p:nvSpPr>
+        <p:spPr>
+          <a:xfrm>
+            <a:off x="594360" y="2377440"/>
+            <a:ext cx="5212080" cy="231648"/>
+          </a:xfrm>
+          <a:prstGeom prst="rect">
+            <a:avLst/>
+          </a:prstGeom>
+          <a:noFill/>
+          <a:effectLst/>
+        </p:spPr>
+        <p:txBody>
+          <a:bodyPr wrap="none" lIns="18288" rIns="18288" tIns="18288" bIns="18288" anchor="t">
+            <a:spAutoFit/>
+          </a:bodyPr>
+          <a:lstStyle/>
+          <a:p>
+            <a:pPr algn="l">
+              <a:spcAft>
+                <a:spcPts val="0"/>
+              </a:spcAft>
+            </a:pPr>
+            <a:r>
+              <a:rPr sz="1200" b="1" i="0">
+                <a:solidFill>
+                  <a:srgbClr val="F2B880"/>
+                </a:solidFill>
+                <a:latin typeface="Arial"/>
+              </a:rPr>
+              <a:t>δU_b = D_f ∫ (wₓₓₓₓ + 2w_xxyy + w_yyyy) δw dA = D_f ∫ ∇⁴w δw dA</a:t>
+            </a:r>
+          </a:p>
+        </p:txBody>
+      </p:sp>
+      <p:sp>
+        <p:nvSpPr>
+          <p:cNvPr id="8" name="C4-E05 text 6" descr="sci-ppt:o006"/>
+          <p:cNvSpPr txBox="1"/>
+          <p:nvPr/>
+        </p:nvSpPr>
+        <p:spPr>
+          <a:xfrm>
+            <a:off x="594360" y="3063240"/>
+            <a:ext cx="5212080" cy="223900"/>
+          </a:xfrm>
+          <a:prstGeom prst="rect">
+            <a:avLst/>
+          </a:prstGeom>
+          <a:noFill/>
+          <a:effectLst/>
+        </p:spPr>
+        <p:txBody>
+          <a:bodyPr wrap="none" lIns="18288" rIns="18288" tIns="18288" bIns="18288" anchor="t">
+            <a:spAutoFit/>
+          </a:bodyPr>
+          <a:lstStyle/>
+          <a:p>
+            <a:pPr algn="l">
+              <a:spcAft>
+                <a:spcPts val="0"/>
+              </a:spcAft>
+            </a:pPr>
+            <a:r>
+              <a:rPr sz="1150" b="0" i="0">
+                <a:solidFill>
+                  <a:srgbClr val="B4C7D2"/>
+                </a:solidFill>
+                <a:latin typeface="Arial"/>
+              </a:rPr>
+              <a:t>Poisson ratio cancels from the interior operator.</a:t>
+            </a:r>
+          </a:p>
+        </p:txBody>
+      </p:sp>
+      <p:sp>
+        <p:nvSpPr>
+          <p:cNvPr id="9" name="C4-E05 round_rect 7" descr="sci-ppt:o007"/>
+          <p:cNvSpPr/>
+          <p:nvPr/>
+        </p:nvSpPr>
+        <p:spPr>
+          <a:xfrm>
+            <a:off x="6217920" y="1371600"/>
+            <a:ext cx="5486400" cy="2286000"/>
+          </a:xfrm>
+          <a:prstGeom prst="roundRect">
+            <a:avLst/>
+          </a:prstGeom>
+          <a:solidFill>
+            <a:srgbClr val="213E4B"/>
+          </a:solidFill>
+          <a:ln w="20320">
+            <a:solidFill>
+              <a:srgbClr val="F28BA0"/>
+            </a:solidFill>
+          </a:ln>
+          <a:effectLst/>
+        </p:spPr>
+        <p:txBody>
+          <a:bodyPr rtlCol="0" anchor="ctr"/>
+          <a:lstStyle/>
+          <a:p>
+            <a:pPr algn="ctr"/>
+          </a:p>
+        </p:txBody>
+      </p:sp>
+      <p:sp>
+        <p:nvSpPr>
+          <p:cNvPr id="10" name="C4-E05 text 8" descr="sci-ppt:o008"/>
+          <p:cNvSpPr txBox="1"/>
+          <p:nvPr/>
+        </p:nvSpPr>
+        <p:spPr>
+          <a:xfrm>
+            <a:off x="6327648" y="1426464"/>
+            <a:ext cx="5266944" cy="254889"/>
+          </a:xfrm>
+          <a:prstGeom prst="rect">
+            <a:avLst/>
+          </a:prstGeom>
+          <a:noFill/>
+          <a:effectLst/>
+        </p:spPr>
+        <p:txBody>
+          <a:bodyPr wrap="none" lIns="18288" rIns="18288" tIns="18288" bIns="18288" anchor="t">
+            <a:spAutoFit/>
+          </a:bodyPr>
+          <a:lstStyle/>
+          <a:p>
+            <a:pPr algn="l">
+              <a:spcAft>
+                <a:spcPts val="0"/>
+              </a:spcAft>
+            </a:pPr>
+            <a:r>
+              <a:rPr sz="1350" b="1" i="0">
+                <a:solidFill>
+                  <a:srgbClr val="F28BA0"/>
+                </a:solidFill>
+                <a:latin typeface="Arial"/>
+              </a:rPr>
+              <a:t>Tension variation</a:t>
+            </a:r>
+          </a:p>
+        </p:txBody>
+      </p:sp>
+      <p:sp>
+        <p:nvSpPr>
+          <p:cNvPr id="11" name="C4-E05 text 9" descr="sci-ppt:o009"/>
+          <p:cNvSpPr txBox="1"/>
+          <p:nvPr/>
+        </p:nvSpPr>
+        <p:spPr>
+          <a:xfrm>
+            <a:off x="6355080" y="1828800"/>
+            <a:ext cx="5212080" cy="239395"/>
+          </a:xfrm>
+          <a:prstGeom prst="rect">
+            <a:avLst/>
+          </a:prstGeom>
+          <a:noFill/>
+          <a:effectLst/>
+        </p:spPr>
+        <p:txBody>
+          <a:bodyPr wrap="none" lIns="18288" rIns="18288" tIns="18288" bIns="18288" anchor="t">
+            <a:spAutoFit/>
+          </a:bodyPr>
+          <a:lstStyle/>
+          <a:p>
+            <a:pPr algn="l">
+              <a:spcAft>
+                <a:spcPts val="0"/>
+              </a:spcAft>
+            </a:pPr>
+            <a:r>
+              <a:rPr sz="1250" b="1" i="0">
+                <a:solidFill>
+                  <a:srgbClr val="E7F0F3"/>
+                </a:solidFill>
+                <a:latin typeface="Arial"/>
+              </a:rPr>
+              <a:t>δU_T = T₀ ∫ ∇w·∇δw dA</a:t>
+            </a:r>
+          </a:p>
+        </p:txBody>
+      </p:sp>
+      <p:sp>
+        <p:nvSpPr>
+          <p:cNvPr id="12" name="C4-E05 text 10" descr="sci-ppt:o010"/>
+          <p:cNvSpPr txBox="1"/>
+          <p:nvPr/>
+        </p:nvSpPr>
+        <p:spPr>
+          <a:xfrm>
+            <a:off x="6355080" y="2331720"/>
+            <a:ext cx="5212080" cy="239395"/>
+          </a:xfrm>
+          <a:prstGeom prst="rect">
+            <a:avLst/>
+          </a:prstGeom>
+          <a:noFill/>
+          <a:effectLst/>
+        </p:spPr>
+        <p:txBody>
+          <a:bodyPr wrap="none" lIns="18288" rIns="18288" tIns="18288" bIns="18288" anchor="t">
+            <a:spAutoFit/>
+          </a:bodyPr>
+          <a:lstStyle/>
+          <a:p>
+            <a:pPr algn="l">
+              <a:spcAft>
+                <a:spcPts val="0"/>
+              </a:spcAft>
+            </a:pPr>
+            <a:r>
+              <a:rPr sz="1250" b="1" i="0">
+                <a:solidFill>
+                  <a:srgbClr val="F28BA0"/>
+                </a:solidFill>
+                <a:latin typeface="Arial"/>
+              </a:rPr>
+              <a:t>= −T₀ ∫ ∇²w δw dA   (δw = 0 on the clamp)</a:t>
+            </a:r>
+          </a:p>
+        </p:txBody>
+      </p:sp>
+      <p:cxnSp>
+        <p:nvCxnSpPr>
+          <p:cNvPr id="13" name="C4-E05 line 11" descr="sci-ppt:o011"/>
+          <p:cNvCxnSpPr/>
+          <p:nvPr/>
+        </p:nvCxnSpPr>
+        <p:spPr>
+          <a:xfrm>
+            <a:off x="914400" y="5577840"/>
+            <a:ext cx="4754880" cy="0"/>
+          </a:xfrm>
+          <a:prstGeom prst="line">
+            <a:avLst/>
+          </a:prstGeom>
           <a:ln w="19050">
             <a:solidFill>
               <a:srgbClr val="B4C7D2"/>
@@ -3158,24 +3541,83 @@
           </a:ln>
           <a:effectLst/>
         </p:spPr>
-        <p:txBody>
-          <a:bodyPr rtlCol="0" anchor="ctr"/>
-          <a:lstStyle/>
-          <a:p>
-            <a:pPr algn="ctr"/>
-          </a:p>
-        </p:txBody>
-      </p:sp>
-      <p:sp>
-        <p:nvSpPr>
-          <p:cNvPr id="4" name="C4-E05 text 2" descr="sci-ppt:o002"/>
+      </p:cxnSp>
+      <p:cxnSp>
+        <p:nvCxnSpPr>
+          <p:cNvPr id="14" name="C4-E05 line 12" descr="sci-ppt:o012"/>
+          <p:cNvCxnSpPr/>
+          <p:nvPr/>
+        </p:nvCxnSpPr>
+        <p:spPr>
+          <a:xfrm>
+            <a:off x="914400" y="4023360"/>
+            <a:ext cx="0" cy="1554480"/>
+          </a:xfrm>
+          <a:prstGeom prst="line">
+            <a:avLst/>
+          </a:prstGeom>
+          <a:ln w="19050">
+            <a:solidFill>
+              <a:srgbClr val="B4C7D2"/>
+            </a:solidFill>
+          </a:ln>
+          <a:effectLst/>
+        </p:spPr>
+      </p:cxnSp>
+      <p:cxnSp>
+        <p:nvCxnSpPr>
+          <p:cNvPr id="15" name="C4-E05 line 13" descr="sci-ppt:o013"/>
+          <p:cNvCxnSpPr/>
+          <p:nvPr/>
+        </p:nvCxnSpPr>
+        <p:spPr>
+          <a:xfrm>
+            <a:off x="914400" y="5577840"/>
+            <a:ext cx="0" cy="64008"/>
+          </a:xfrm>
+          <a:prstGeom prst="line">
+            <a:avLst/>
+          </a:prstGeom>
+          <a:ln w="12700">
+            <a:solidFill>
+              <a:srgbClr val="B4C7D2"/>
+            </a:solidFill>
+          </a:ln>
+          <a:effectLst/>
+        </p:spPr>
+      </p:cxnSp>
+      <p:cxnSp>
+        <p:nvCxnSpPr>
+          <p:cNvPr id="16" name="C4-E05 line 14" descr="sci-ppt:o014"/>
+          <p:cNvCxnSpPr/>
+          <p:nvPr/>
+        </p:nvCxnSpPr>
+        <p:spPr>
+          <a:xfrm>
+            <a:off x="914400" y="4023360"/>
+            <a:ext cx="0" cy="1554480"/>
+          </a:xfrm>
+          <a:prstGeom prst="line">
+            <a:avLst/>
+          </a:prstGeom>
+          <a:ln w="7620">
+            <a:solidFill>
+              <a:srgbClr val="2E4756"/>
+            </a:solidFill>
+          </a:ln>
+          <a:effectLst/>
+        </p:spPr>
+      </p:cxnSp>
+      <p:sp>
+        <p:nvSpPr>
+          <p:cNvPr id="17" name="C4-E05 text 15" descr="sci-ppt:o015"/>
           <p:cNvSpPr txBox="1"/>
           <p:nvPr/>
         </p:nvSpPr>
         <p:spPr>
           <a:xfrm>
-            <a:off x="2743200" y="1828800"/>
-            <a:ext cx="5029200" cy="548640"/>
+            <a:off x="457200" y="5660136"/>
+            <a:ext cx="914400" cy="208407"/>
           </a:xfrm>
           <a:prstGeom prst="rect">
             <a:avLst/>
@@ -3184,7 +3626,339 @@
           <a:effectLst/>
         </p:spPr>
         <p:txBody>
-          <a:bodyPr wrap="square" lIns="27432" rIns="27432" tIns="18288" bIns="18288" anchor="ctr">
+          <a:bodyPr wrap="none" lIns="18288" rIns="18288" tIns="18288" bIns="18288" anchor="t">
+            <a:spAutoFit/>
+          </a:bodyPr>
+          <a:lstStyle/>
+          <a:p>
+            <a:pPr algn="ctr">
+              <a:spcAft>
+                <a:spcPts val="0"/>
+              </a:spcAft>
+            </a:pPr>
+            <a:r>
+              <a:rPr sz="1050" b="0" i="0">
+                <a:solidFill>
+                  <a:srgbClr val="B4C7D2"/>
+                </a:solidFill>
+                <a:latin typeface="Arial"/>
+              </a:rPr>
+              <a:t>0</a:t>
+            </a:r>
+          </a:p>
+        </p:txBody>
+      </p:sp>
+      <p:cxnSp>
+        <p:nvCxnSpPr>
+          <p:cNvPr id="18" name="C4-E05 line 16" descr="sci-ppt:o016"/>
+          <p:cNvCxnSpPr/>
+          <p:nvPr/>
+        </p:nvCxnSpPr>
+        <p:spPr>
+          <a:xfrm>
+            <a:off x="3291840" y="5577840"/>
+            <a:ext cx="0" cy="64008"/>
+          </a:xfrm>
+          <a:prstGeom prst="line">
+            <a:avLst/>
+          </a:prstGeom>
+          <a:ln w="12700">
+            <a:solidFill>
+              <a:srgbClr val="B4C7D2"/>
+            </a:solidFill>
+          </a:ln>
+          <a:effectLst/>
+        </p:spPr>
+      </p:cxnSp>
+      <p:cxnSp>
+        <p:nvCxnSpPr>
+          <p:cNvPr id="19" name="C4-E05 line 17" descr="sci-ppt:o017"/>
+          <p:cNvCxnSpPr/>
+          <p:nvPr/>
+        </p:nvCxnSpPr>
+        <p:spPr>
+          <a:xfrm>
+            <a:off x="3291840" y="4023360"/>
+            <a:ext cx="0" cy="1554480"/>
+          </a:xfrm>
+          <a:prstGeom prst="line">
+            <a:avLst/>
+          </a:prstGeom>
+          <a:ln w="7620">
+            <a:solidFill>
+              <a:srgbClr val="2E4756"/>
+            </a:solidFill>
+          </a:ln>
+          <a:effectLst/>
+        </p:spPr>
+      </p:cxnSp>
+      <p:sp>
+        <p:nvSpPr>
+          <p:cNvPr id="20" name="C4-E05 text 18" descr="sci-ppt:o018"/>
+          <p:cNvSpPr txBox="1"/>
+          <p:nvPr/>
+        </p:nvSpPr>
+        <p:spPr>
+          <a:xfrm>
+            <a:off x="2834640" y="5660136"/>
+            <a:ext cx="914400" cy="208407"/>
+          </a:xfrm>
+          <a:prstGeom prst="rect">
+            <a:avLst/>
+          </a:prstGeom>
+          <a:noFill/>
+          <a:effectLst/>
+        </p:spPr>
+        <p:txBody>
+          <a:bodyPr wrap="none" lIns="18288" rIns="18288" tIns="18288" bIns="18288" anchor="t">
+            <a:spAutoFit/>
+          </a:bodyPr>
+          <a:lstStyle/>
+          <a:p>
+            <a:pPr algn="ctr">
+              <a:spcAft>
+                <a:spcPts val="0"/>
+              </a:spcAft>
+            </a:pPr>
+            <a:r>
+              <a:rPr sz="1050" b="0" i="0">
+                <a:solidFill>
+                  <a:srgbClr val="B4C7D2"/>
+                </a:solidFill>
+                <a:latin typeface="Arial"/>
+              </a:rPr>
+              <a:t>0.25</a:t>
+            </a:r>
+          </a:p>
+        </p:txBody>
+      </p:sp>
+      <p:cxnSp>
+        <p:nvCxnSpPr>
+          <p:cNvPr id="21" name="C4-E05 line 19" descr="sci-ppt:o019"/>
+          <p:cNvCxnSpPr/>
+          <p:nvPr/>
+        </p:nvCxnSpPr>
+        <p:spPr>
+          <a:xfrm>
+            <a:off x="5669280" y="5577840"/>
+            <a:ext cx="0" cy="64008"/>
+          </a:xfrm>
+          <a:prstGeom prst="line">
+            <a:avLst/>
+          </a:prstGeom>
+          <a:ln w="12700">
+            <a:solidFill>
+              <a:srgbClr val="B4C7D2"/>
+            </a:solidFill>
+          </a:ln>
+          <a:effectLst/>
+        </p:spPr>
+      </p:cxnSp>
+      <p:cxnSp>
+        <p:nvCxnSpPr>
+          <p:cNvPr id="22" name="C4-E05 line 20" descr="sci-ppt:o020"/>
+          <p:cNvCxnSpPr/>
+          <p:nvPr/>
+        </p:nvCxnSpPr>
+        <p:spPr>
+          <a:xfrm>
+            <a:off x="5669280" y="4023360"/>
+            <a:ext cx="0" cy="1554480"/>
+          </a:xfrm>
+          <a:prstGeom prst="line">
+            <a:avLst/>
+          </a:prstGeom>
+          <a:ln w="7620">
+            <a:solidFill>
+              <a:srgbClr val="2E4756"/>
+            </a:solidFill>
+          </a:ln>
+          <a:effectLst/>
+        </p:spPr>
+      </p:cxnSp>
+      <p:sp>
+        <p:nvSpPr>
+          <p:cNvPr id="23" name="C4-E05 text 21" descr="sci-ppt:o021"/>
+          <p:cNvSpPr txBox="1"/>
+          <p:nvPr/>
+        </p:nvSpPr>
+        <p:spPr>
+          <a:xfrm>
+            <a:off x="5212080" y="5660136"/>
+            <a:ext cx="914400" cy="208407"/>
+          </a:xfrm>
+          <a:prstGeom prst="rect">
+            <a:avLst/>
+          </a:prstGeom>
+          <a:noFill/>
+          <a:effectLst/>
+        </p:spPr>
+        <p:txBody>
+          <a:bodyPr wrap="none" lIns="18288" rIns="18288" tIns="18288" bIns="18288" anchor="t">
+            <a:spAutoFit/>
+          </a:bodyPr>
+          <a:lstStyle/>
+          <a:p>
+            <a:pPr algn="ctr">
+              <a:spcAft>
+                <a:spcPts val="0"/>
+              </a:spcAft>
+            </a:pPr>
+            <a:r>
+              <a:rPr sz="1050" b="0" i="0">
+                <a:solidFill>
+                  <a:srgbClr val="B4C7D2"/>
+                </a:solidFill>
+                <a:latin typeface="Arial"/>
+              </a:rPr>
+              <a:t>0.5</a:t>
+            </a:r>
+          </a:p>
+        </p:txBody>
+      </p:sp>
+      <p:cxnSp>
+        <p:nvCxnSpPr>
+          <p:cNvPr id="24" name="C4-E05 line 22" descr="sci-ppt:o022"/>
+          <p:cNvCxnSpPr/>
+          <p:nvPr/>
+        </p:nvCxnSpPr>
+        <p:spPr>
+          <a:xfrm>
+            <a:off x="850392" y="4800600"/>
+            <a:ext cx="64008" cy="0"/>
+          </a:xfrm>
+          <a:prstGeom prst="line">
+            <a:avLst/>
+          </a:prstGeom>
+          <a:ln w="12700">
+            <a:solidFill>
+              <a:srgbClr val="B4C7D2"/>
+            </a:solidFill>
+          </a:ln>
+          <a:effectLst/>
+        </p:spPr>
+      </p:cxnSp>
+      <p:cxnSp>
+        <p:nvCxnSpPr>
+          <p:cNvPr id="25" name="C4-E05 line 23" descr="sci-ppt:o023"/>
+          <p:cNvCxnSpPr/>
+          <p:nvPr/>
+        </p:nvCxnSpPr>
+        <p:spPr>
+          <a:xfrm>
+            <a:off x="914400" y="4800600"/>
+            <a:ext cx="4754880" cy="0"/>
+          </a:xfrm>
+          <a:prstGeom prst="line">
+            <a:avLst/>
+          </a:prstGeom>
+          <a:ln w="7620">
+            <a:solidFill>
+              <a:srgbClr val="2E4756"/>
+            </a:solidFill>
+          </a:ln>
+          <a:effectLst/>
+        </p:spPr>
+      </p:cxnSp>
+      <p:sp>
+        <p:nvSpPr>
+          <p:cNvPr id="26" name="C4-E05 text 24" descr="sci-ppt:o024"/>
+          <p:cNvSpPr txBox="1"/>
+          <p:nvPr/>
+        </p:nvSpPr>
+        <p:spPr>
+          <a:xfrm>
+            <a:off x="45720" y="4718304"/>
+            <a:ext cx="777240" cy="208407"/>
+          </a:xfrm>
+          <a:prstGeom prst="rect">
+            <a:avLst/>
+          </a:prstGeom>
+          <a:noFill/>
+          <a:effectLst/>
+        </p:spPr>
+        <p:txBody>
+          <a:bodyPr wrap="none" lIns="18288" rIns="18288" tIns="18288" bIns="18288" anchor="t">
+            <a:spAutoFit/>
+          </a:bodyPr>
+          <a:lstStyle/>
+          <a:p>
+            <a:pPr algn="r">
+              <a:spcAft>
+                <a:spcPts val="0"/>
+              </a:spcAft>
+            </a:pPr>
+            <a:r>
+              <a:rPr sz="1050" b="0" i="0">
+                <a:solidFill>
+                  <a:srgbClr val="B4C7D2"/>
+                </a:solidFill>
+                <a:latin typeface="Arial"/>
+              </a:rPr>
+              <a:t>2</a:t>
+            </a:r>
+          </a:p>
+        </p:txBody>
+      </p:sp>
+      <p:sp>
+        <p:nvSpPr>
+          <p:cNvPr id="27" name="C4-E05 text 25" descr="sci-ppt:o025"/>
+          <p:cNvSpPr txBox="1"/>
+          <p:nvPr/>
+        </p:nvSpPr>
+        <p:spPr>
+          <a:xfrm>
+            <a:off x="914400" y="5861304"/>
+            <a:ext cx="4754880" cy="231648"/>
+          </a:xfrm>
+          <a:prstGeom prst="rect">
+            <a:avLst/>
+          </a:prstGeom>
+          <a:noFill/>
+          <a:effectLst/>
+        </p:spPr>
+        <p:txBody>
+          <a:bodyPr wrap="none" lIns="18288" rIns="18288" tIns="18288" bIns="18288" anchor="t">
+            <a:spAutoFit/>
+          </a:bodyPr>
+          <a:lstStyle/>
+          <a:p>
+            <a:pPr algn="ctr">
+              <a:spcAft>
+                <a:spcPts val="0"/>
+              </a:spcAft>
+            </a:pPr>
+            <a:r>
+              <a:rPr sz="1200" b="0" i="0">
+                <a:solidFill>
+                  <a:srgbClr val="E7F0F3"/>
+                </a:solidFill>
+                <a:latin typeface="Arial"/>
+              </a:rPr>
+              <a:t>ν_f</a:t>
+            </a:r>
+          </a:p>
+        </p:txBody>
+      </p:sp>
+      <p:sp>
+        <p:nvSpPr>
+          <p:cNvPr id="28" name="C4-E05 text 26" descr="sci-ppt:o026"/>
+          <p:cNvSpPr txBox="1"/>
+          <p:nvPr/>
+        </p:nvSpPr>
+        <p:spPr>
+          <a:xfrm>
+            <a:off x="365760" y="3675888"/>
+            <a:ext cx="4754880" cy="231648"/>
+          </a:xfrm>
+          <a:prstGeom prst="rect">
+            <a:avLst/>
+          </a:prstGeom>
+          <a:noFill/>
+          <a:effectLst/>
+        </p:spPr>
+        <p:txBody>
+          <a:bodyPr wrap="none" lIns="18288" rIns="18288" tIns="18288" bIns="18288" anchor="t">
             <a:spAutoFit/>
           </a:bodyPr>
           <a:lstStyle/>
@@ -3195,67 +3969,215 @@
               </a:spcAft>
             </a:pPr>
             <a:r>
-              <a:rPr sz="2000" b="0" i="0">
+              <a:rPr sz="1200" b="0" i="0">
                 <a:solidFill>
                   <a:srgbClr val="E7F0F3"/>
                 </a:solidFill>
                 <a:latin typeface="Arial"/>
               </a:rPr>
-              <a:t>Reference film plane Ω_f</a:t>
-            </a:r>
-          </a:p>
-          <a:p>
-            <a:pPr algn="l">
-              <a:spcAft>
-                <a:spcPts val="0"/>
-              </a:spcAft>
-            </a:pPr>
-            <a:r>
-              <a:rPr sz="2000" b="0" i="0">
-                <a:solidFill>
-                  <a:srgbClr val="E7F0F3"/>
-                </a:solidFill>
-                <a:latin typeface="Arial"/>
-              </a:rPr>
-              <a:t>w(x,y,t), variation δw</a:t>
-            </a:r>
-          </a:p>
-        </p:txBody>
-      </p:sp>
-      <p:cxnSp>
-        <p:nvCxnSpPr>
-          <p:cNvPr id="5" name="C4-E05 arrow 3" descr="sci-ppt:o003"/>
-          <p:cNvCxnSpPr/>
+              <a:t>coefficient</a:t>
+            </a:r>
+          </a:p>
+        </p:txBody>
+      </p:sp>
+      <p:sp>
+        <p:nvSpPr>
+          <p:cNvPr id="29" name="C4-E05 polygon 27" descr="sci-ppt:o027"/>
+          <p:cNvSpPr/>
           <p:nvPr/>
-        </p:nvCxnSpPr>
-        <p:spPr>
-          <a:xfrm>
-            <a:off x="8092440" y="2240280"/>
-            <a:ext cx="1143000" cy="0"/>
-          </a:xfrm>
-          <a:prstGeom prst="line">
+        </p:nvSpPr>
+        <p:spPr>
+          <a:xfrm>
+            <a:off x="914400" y="4800600"/>
+            <a:ext cx="4754880" cy="0"/>
+          </a:xfrm>
+          <a:custGeom>
             <a:avLst/>
-          </a:prstGeom>
-          <a:ln w="25400">
+            <a:gdLst/>
+            <a:ahLst/>
+            <a:cxnLst/>
+            <a:rect l="l" t="t" r="r" b="b"/>
+            <a:pathLst>
+              <a:path w="4754880" h="0">
+                <a:moveTo>
+                  <a:pt x="0" y="0"/>
+                </a:moveTo>
+                <a:lnTo>
+                  <a:pt x="97038" y="0"/>
+                </a:lnTo>
+                <a:lnTo>
+                  <a:pt x="194076" y="0"/>
+                </a:lnTo>
+                <a:lnTo>
+                  <a:pt x="291115" y="0"/>
+                </a:lnTo>
+                <a:lnTo>
+                  <a:pt x="388153" y="0"/>
+                </a:lnTo>
+                <a:lnTo>
+                  <a:pt x="485191" y="0"/>
+                </a:lnTo>
+                <a:lnTo>
+                  <a:pt x="582230" y="0"/>
+                </a:lnTo>
+                <a:lnTo>
+                  <a:pt x="679268" y="0"/>
+                </a:lnTo>
+                <a:lnTo>
+                  <a:pt x="776306" y="0"/>
+                </a:lnTo>
+                <a:lnTo>
+                  <a:pt x="873345" y="0"/>
+                </a:lnTo>
+                <a:lnTo>
+                  <a:pt x="970383" y="0"/>
+                </a:lnTo>
+                <a:lnTo>
+                  <a:pt x="1067422" y="0"/>
+                </a:lnTo>
+                <a:lnTo>
+                  <a:pt x="1164460" y="0"/>
+                </a:lnTo>
+                <a:lnTo>
+                  <a:pt x="1261498" y="0"/>
+                </a:lnTo>
+                <a:lnTo>
+                  <a:pt x="1358537" y="0"/>
+                </a:lnTo>
+                <a:lnTo>
+                  <a:pt x="1455575" y="0"/>
+                </a:lnTo>
+                <a:lnTo>
+                  <a:pt x="1552613" y="0"/>
+                </a:lnTo>
+                <a:lnTo>
+                  <a:pt x="1649652" y="0"/>
+                </a:lnTo>
+                <a:lnTo>
+                  <a:pt x="1746690" y="0"/>
+                </a:lnTo>
+                <a:lnTo>
+                  <a:pt x="1843728" y="0"/>
+                </a:lnTo>
+                <a:lnTo>
+                  <a:pt x="1940767" y="0"/>
+                </a:lnTo>
+                <a:lnTo>
+                  <a:pt x="2037805" y="0"/>
+                </a:lnTo>
+                <a:lnTo>
+                  <a:pt x="2134844" y="0"/>
+                </a:lnTo>
+                <a:lnTo>
+                  <a:pt x="2231882" y="0"/>
+                </a:lnTo>
+                <a:lnTo>
+                  <a:pt x="2328920" y="0"/>
+                </a:lnTo>
+                <a:lnTo>
+                  <a:pt x="2425959" y="0"/>
+                </a:lnTo>
+                <a:lnTo>
+                  <a:pt x="2522997" y="0"/>
+                </a:lnTo>
+                <a:lnTo>
+                  <a:pt x="2620035" y="0"/>
+                </a:lnTo>
+                <a:lnTo>
+                  <a:pt x="2717074" y="0"/>
+                </a:lnTo>
+                <a:lnTo>
+                  <a:pt x="2814112" y="0"/>
+                </a:lnTo>
+                <a:lnTo>
+                  <a:pt x="2911151" y="0"/>
+                </a:lnTo>
+                <a:lnTo>
+                  <a:pt x="3008189" y="0"/>
+                </a:lnTo>
+                <a:lnTo>
+                  <a:pt x="3105227" y="0"/>
+                </a:lnTo>
+                <a:lnTo>
+                  <a:pt x="3202266" y="0"/>
+                </a:lnTo>
+                <a:lnTo>
+                  <a:pt x="3299304" y="0"/>
+                </a:lnTo>
+                <a:lnTo>
+                  <a:pt x="3396342" y="0"/>
+                </a:lnTo>
+                <a:lnTo>
+                  <a:pt x="3493381" y="0"/>
+                </a:lnTo>
+                <a:lnTo>
+                  <a:pt x="3590419" y="0"/>
+                </a:lnTo>
+                <a:lnTo>
+                  <a:pt x="3687457" y="0"/>
+                </a:lnTo>
+                <a:lnTo>
+                  <a:pt x="3784496" y="0"/>
+                </a:lnTo>
+                <a:lnTo>
+                  <a:pt x="3881534" y="0"/>
+                </a:lnTo>
+                <a:lnTo>
+                  <a:pt x="3978573" y="0"/>
+                </a:lnTo>
+                <a:lnTo>
+                  <a:pt x="4075611" y="0"/>
+                </a:lnTo>
+                <a:lnTo>
+                  <a:pt x="4172649" y="0"/>
+                </a:lnTo>
+                <a:lnTo>
+                  <a:pt x="4269688" y="0"/>
+                </a:lnTo>
+                <a:lnTo>
+                  <a:pt x="4366726" y="0"/>
+                </a:lnTo>
+                <a:lnTo>
+                  <a:pt x="4463764" y="0"/>
+                </a:lnTo>
+                <a:lnTo>
+                  <a:pt x="4560803" y="0"/>
+                </a:lnTo>
+                <a:lnTo>
+                  <a:pt x="4657841" y="0"/>
+                </a:lnTo>
+                <a:lnTo>
+                  <a:pt x="4754880" y="0"/>
+                </a:lnTo>
+              </a:path>
+            </a:pathLst>
+          </a:custGeom>
+          <a:noFill/>
+          <a:ln w="38100">
             <a:solidFill>
               <a:srgbClr val="8EDBD4"/>
             </a:solidFill>
-            <a:headEnd type="none" w="med" len="med"/>
-            <a:tailEnd type="triangle" w="med" len="med"/>
           </a:ln>
           <a:effectLst/>
         </p:spPr>
-      </p:cxnSp>
-      <p:sp>
-        <p:nvSpPr>
-          <p:cNvPr id="6" name="C4-E05 text 4" descr="sci-ppt:o004"/>
+        <p:txBody>
+          <a:bodyPr rtlCol="0" anchor="ctr"/>
+          <a:lstStyle/>
+          <a:p>
+            <a:pPr algn="ctr"/>
+          </a:p>
+        </p:txBody>
+      </p:sp>
+      <p:sp>
+        <p:nvSpPr>
+          <p:cNvPr id="30" name="C4-E05 text 28" descr="sci-ppt:o028"/>
           <p:cNvSpPr txBox="1"/>
           <p:nvPr/>
         </p:nvSpPr>
         <p:spPr>
           <a:xfrm>
-            <a:off x="9418320" y="2011680"/>
-            <a:ext cx="2286000" cy="548640"/>
+            <a:off x="1463040" y="4242816"/>
+            <a:ext cx="3108960" cy="223900"/>
           </a:xfrm>
           <a:prstGeom prst="rect">
             <a:avLst/>
@@ -3264,533 +4186,7 @@
           <a:effectLst/>
         </p:spPr>
         <p:txBody>
-          <a:bodyPr wrap="square" lIns="27432" rIns="27432" tIns="18288" bIns="18288" anchor="ctr">
-            <a:spAutoFit/>
-          </a:bodyPr>
-          <a:lstStyle/>
-          <a:p>
-            <a:pPr algn="l">
-              <a:spcAft>
-                <a:spcPts val="0"/>
-              </a:spcAft>
-            </a:pPr>
-            <a:r>
-              <a:rPr sz="1600" b="0" i="0">
-                <a:solidFill>
-                  <a:srgbClr val="E7F0F3"/>
-                </a:solidFill>
-                <a:latin typeface="Arial"/>
-              </a:rPr>
-              <a:t>n: outward</a:t>
-            </a:r>
-          </a:p>
-          <a:p>
-            <a:pPr algn="l">
-              <a:spcAft>
-                <a:spcPts val="0"/>
-              </a:spcAft>
-            </a:pPr>
-            <a:r>
-              <a:rPr sz="1600" b="0" i="0">
-                <a:solidFill>
-                  <a:srgbClr val="E7F0F3"/>
-                </a:solidFill>
-                <a:latin typeface="Arial"/>
-              </a:rPr>
-              <a:t>in-plane normal</a:t>
-            </a:r>
-          </a:p>
-        </p:txBody>
-      </p:sp>
-      <p:cxnSp>
-        <p:nvCxnSpPr>
-          <p:cNvPr id="7" name="C4-E05 arrow 5" descr="sci-ppt:o005"/>
-          <p:cNvCxnSpPr/>
-          <p:nvPr/>
-        </p:nvCxnSpPr>
-        <p:spPr>
-          <a:xfrm>
-            <a:off x="1371600" y="3520440"/>
-            <a:ext cx="1828800" cy="0"/>
-          </a:xfrm>
-          <a:prstGeom prst="line">
-            <a:avLst/>
-          </a:prstGeom>
-          <a:ln w="25400">
-            <a:solidFill>
-              <a:srgbClr val="8EDBD4"/>
-            </a:solidFill>
-            <a:headEnd type="none" w="med" len="med"/>
-            <a:tailEnd type="triangle" w="med" len="med"/>
-          </a:ln>
-          <a:effectLst/>
-        </p:spPr>
-      </p:cxnSp>
-      <p:sp>
-        <p:nvSpPr>
-          <p:cNvPr id="8" name="C4-E05 text 6" descr="sci-ppt:o006"/>
-          <p:cNvSpPr txBox="1"/>
-          <p:nvPr/>
-        </p:nvSpPr>
-        <p:spPr>
-          <a:xfrm>
-            <a:off x="3383280" y="3383280"/>
-            <a:ext cx="914400" cy="274320"/>
-          </a:xfrm>
-          <a:prstGeom prst="rect">
-            <a:avLst/>
-          </a:prstGeom>
-          <a:noFill/>
-          <a:effectLst/>
-        </p:spPr>
-        <p:txBody>
-          <a:bodyPr wrap="square" lIns="27432" rIns="27432" tIns="18288" bIns="18288" anchor="ctr">
-            <a:spAutoFit/>
-          </a:bodyPr>
-          <a:lstStyle/>
-          <a:p>
-            <a:pPr algn="l">
-              <a:spcAft>
-                <a:spcPts val="0"/>
-              </a:spcAft>
-            </a:pPr>
-            <a:r>
-              <a:rPr sz="1700" b="0" i="0">
-                <a:solidFill>
-                  <a:srgbClr val="E7F0F3"/>
-                </a:solidFill>
-                <a:latin typeface="Arial"/>
-              </a:rPr>
-              <a:t>x</a:t>
-            </a:r>
-          </a:p>
-        </p:txBody>
-      </p:sp>
-      <p:cxnSp>
-        <p:nvCxnSpPr>
-          <p:cNvPr id="9" name="C4-E05 arrow 7" descr="sci-ppt:o007"/>
-          <p:cNvCxnSpPr/>
-          <p:nvPr/>
-        </p:nvCxnSpPr>
-        <p:spPr>
-          <a:xfrm flipV="1">
-            <a:off x="1371600" y="2651760"/>
-            <a:ext cx="0" cy="868680"/>
-          </a:xfrm>
-          <a:prstGeom prst="line">
-            <a:avLst/>
-          </a:prstGeom>
-          <a:ln w="25400">
-            <a:solidFill>
-              <a:srgbClr val="8EDBD4"/>
-            </a:solidFill>
-            <a:headEnd type="none" w="med" len="med"/>
-            <a:tailEnd type="triangle" w="med" len="med"/>
-          </a:ln>
-          <a:effectLst/>
-        </p:spPr>
-      </p:cxnSp>
-      <p:sp>
-        <p:nvSpPr>
-          <p:cNvPr id="10" name="C4-E05 text 8" descr="sci-ppt:o008"/>
-          <p:cNvSpPr txBox="1"/>
-          <p:nvPr/>
-        </p:nvSpPr>
-        <p:spPr>
-          <a:xfrm>
-            <a:off x="731520" y="2834640"/>
-            <a:ext cx="914400" cy="274320"/>
-          </a:xfrm>
-          <a:prstGeom prst="rect">
-            <a:avLst/>
-          </a:prstGeom>
-          <a:noFill/>
-          <a:effectLst/>
-        </p:spPr>
-        <p:txBody>
-          <a:bodyPr wrap="square" lIns="27432" rIns="27432" tIns="18288" bIns="18288" anchor="ctr">
-            <a:spAutoFit/>
-          </a:bodyPr>
-          <a:lstStyle/>
-          <a:p>
-            <a:pPr algn="l">
-              <a:spcAft>
-                <a:spcPts val="0"/>
-              </a:spcAft>
-            </a:pPr>
-            <a:r>
-              <a:rPr sz="1700" b="0" i="0">
-                <a:solidFill>
-                  <a:srgbClr val="E7F0F3"/>
-                </a:solidFill>
-                <a:latin typeface="Arial"/>
-              </a:rPr>
-              <a:t>y</a:t>
-            </a:r>
-          </a:p>
-        </p:txBody>
-      </p:sp>
-      <p:sp>
-        <p:nvSpPr>
-          <p:cNvPr id="11" name="C4-E05 text 9" descr="sci-ppt:o009"/>
-          <p:cNvSpPr txBox="1"/>
-          <p:nvPr/>
-        </p:nvSpPr>
-        <p:spPr>
-          <a:xfrm>
-            <a:off x="1828800" y="731520"/>
-            <a:ext cx="9601200" cy="320040"/>
-          </a:xfrm>
-          <a:prstGeom prst="rect">
-            <a:avLst/>
-          </a:prstGeom>
-          <a:noFill/>
-          <a:effectLst/>
-        </p:spPr>
-        <p:txBody>
-          <a:bodyPr wrap="square" lIns="27432" rIns="27432" tIns="18288" bIns="18288" anchor="ctr">
-            <a:spAutoFit/>
-          </a:bodyPr>
-          <a:lstStyle/>
-          <a:p>
-            <a:pPr algn="l">
-              <a:spcAft>
-                <a:spcPts val="0"/>
-              </a:spcAft>
-            </a:pPr>
-            <a:r>
-              <a:rPr sz="1900" b="0" i="0">
-                <a:solidFill>
-                  <a:srgbClr val="8EDBD4"/>
-                </a:solidFill>
-                <a:latin typeface="Arial"/>
-              </a:rPr>
-              <a:t>Fixed boundary: δw = 0; ∂ₙδw = 0</a:t>
-            </a:r>
-          </a:p>
-        </p:txBody>
-      </p:sp>
-      <p:sp>
-        <p:nvSpPr>
-          <p:cNvPr id="12" name="C4-E05 text 10" descr="sci-ppt:o010"/>
-          <p:cNvSpPr txBox="1"/>
-          <p:nvPr/>
-        </p:nvSpPr>
-        <p:spPr>
-          <a:xfrm>
-            <a:off x="4846320" y="3520440"/>
-            <a:ext cx="6400800" cy="274320"/>
-          </a:xfrm>
-          <a:prstGeom prst="rect">
-            <a:avLst/>
-          </a:prstGeom>
-          <a:noFill/>
-          <a:effectLst/>
-        </p:spPr>
-        <p:txBody>
-          <a:bodyPr wrap="square" lIns="27432" rIns="27432" tIns="18288" bIns="18288" anchor="ctr">
-            <a:spAutoFit/>
-          </a:bodyPr>
-          <a:lstStyle/>
-          <a:p>
-            <a:pPr algn="l">
-              <a:spcAft>
-                <a:spcPts val="0"/>
-              </a:spcAft>
-            </a:pPr>
-            <a:r>
-              <a:rPr sz="1700" b="0" i="0">
-                <a:solidFill>
-                  <a:srgbClr val="8EDBD4"/>
-                </a:solidFill>
-                <a:latin typeface="Arial"/>
-              </a:rPr>
-              <a:t>Curvature stores U_b; slope stores U_T.</a:t>
-            </a:r>
-          </a:p>
-        </p:txBody>
-      </p:sp>
-      <p:cxnSp>
-        <p:nvCxnSpPr>
-          <p:cNvPr id="13" name="C4-E05 line 11" descr="sci-ppt:o011"/>
-          <p:cNvCxnSpPr/>
-          <p:nvPr/>
-        </p:nvCxnSpPr>
-        <p:spPr>
-          <a:xfrm>
-            <a:off x="274320" y="3977639"/>
-            <a:ext cx="11612880" cy="0"/>
-          </a:xfrm>
-          <a:prstGeom prst="line">
-            <a:avLst/>
-          </a:prstGeom>
-          <a:ln w="12700">
-            <a:solidFill>
-              <a:srgbClr val="405967"/>
-            </a:solidFill>
-          </a:ln>
-          <a:effectLst/>
-        </p:spPr>
-      </p:cxnSp>
-      <p:sp>
-        <p:nvSpPr>
-          <p:cNvPr id="14" name="C4-E05 text 12" descr="sci-ppt:o012"/>
-          <p:cNvSpPr txBox="1"/>
-          <p:nvPr/>
-        </p:nvSpPr>
-        <p:spPr>
-          <a:xfrm>
-            <a:off x="320040" y="4096512"/>
-            <a:ext cx="5715000" cy="246888"/>
-          </a:xfrm>
-          <a:prstGeom prst="rect">
-            <a:avLst/>
-          </a:prstGeom>
-          <a:noFill/>
-          <a:effectLst/>
-        </p:spPr>
-        <p:txBody>
-          <a:bodyPr wrap="square" lIns="27432" rIns="27432" tIns="18288" bIns="18288" anchor="ctr">
-            <a:spAutoFit/>
-          </a:bodyPr>
-          <a:lstStyle/>
-          <a:p>
-            <a:pPr algn="l">
-              <a:spcAft>
-                <a:spcPts val="0"/>
-              </a:spcAft>
-            </a:pPr>
-            <a:r>
-              <a:rPr sz="1150" b="0" i="0">
-                <a:solidFill>
-                  <a:srgbClr val="B4C7D2"/>
-                </a:solidFill>
-                <a:latin typeface="Arial"/>
-              </a:rPr>
-              <a:t>• Ω_f, x, y — film plane</a:t>
-            </a:r>
-          </a:p>
-        </p:txBody>
-      </p:sp>
-      <p:sp>
-        <p:nvSpPr>
-          <p:cNvPr id="15" name="C4-E05 text 13" descr="sci-ppt:o013"/>
-          <p:cNvSpPr txBox="1"/>
-          <p:nvPr/>
-        </p:nvSpPr>
-        <p:spPr>
-          <a:xfrm>
-            <a:off x="6217920" y="4096512"/>
-            <a:ext cx="5715000" cy="246888"/>
-          </a:xfrm>
-          <a:prstGeom prst="rect">
-            <a:avLst/>
-          </a:prstGeom>
-          <a:noFill/>
-          <a:effectLst/>
-        </p:spPr>
-        <p:txBody>
-          <a:bodyPr wrap="square" lIns="27432" rIns="27432" tIns="18288" bIns="18288" anchor="ctr">
-            <a:spAutoFit/>
-          </a:bodyPr>
-          <a:lstStyle/>
-          <a:p>
-            <a:pPr algn="l">
-              <a:spcAft>
-                <a:spcPts val="0"/>
-              </a:spcAft>
-            </a:pPr>
-            <a:r>
-              <a:rPr sz="1150" b="0" i="0">
-                <a:solidFill>
-                  <a:srgbClr val="B4C7D2"/>
-                </a:solidFill>
-                <a:latin typeface="Arial"/>
-              </a:rPr>
-              <a:t>• w, δw — displacement and variation</a:t>
-            </a:r>
-          </a:p>
-        </p:txBody>
-      </p:sp>
-      <p:sp>
-        <p:nvSpPr>
-          <p:cNvPr id="16" name="C4-E05 text 14" descr="sci-ppt:o014"/>
-          <p:cNvSpPr txBox="1"/>
-          <p:nvPr/>
-        </p:nvSpPr>
-        <p:spPr>
-          <a:xfrm>
-            <a:off x="320040" y="4329684"/>
-            <a:ext cx="5715000" cy="246888"/>
-          </a:xfrm>
-          <a:prstGeom prst="rect">
-            <a:avLst/>
-          </a:prstGeom>
-          <a:noFill/>
-          <a:effectLst/>
-        </p:spPr>
-        <p:txBody>
-          <a:bodyPr wrap="square" lIns="27432" rIns="27432" tIns="18288" bIns="18288" anchor="ctr">
-            <a:spAutoFit/>
-          </a:bodyPr>
-          <a:lstStyle/>
-          <a:p>
-            <a:pPr algn="l">
-              <a:spcAft>
-                <a:spcPts val="0"/>
-              </a:spcAft>
-            </a:pPr>
-            <a:r>
-              <a:rPr sz="1150" b="0" i="0">
-                <a:solidFill>
-                  <a:srgbClr val="B4C7D2"/>
-                </a:solidFill>
-                <a:latin typeface="Arial"/>
-              </a:rPr>
-              <a:t>• D_f, ν_f → ∇⁴w restoring load</a:t>
-            </a:r>
-          </a:p>
-        </p:txBody>
-      </p:sp>
-      <p:sp>
-        <p:nvSpPr>
-          <p:cNvPr id="17" name="C4-E05 text 15" descr="sci-ppt:o015"/>
-          <p:cNvSpPr txBox="1"/>
-          <p:nvPr/>
-        </p:nvSpPr>
-        <p:spPr>
-          <a:xfrm>
-            <a:off x="6217920" y="4329684"/>
-            <a:ext cx="5715000" cy="246888"/>
-          </a:xfrm>
-          <a:prstGeom prst="rect">
-            <a:avLst/>
-          </a:prstGeom>
-          <a:noFill/>
-          <a:effectLst/>
-        </p:spPr>
-        <p:txBody>
-          <a:bodyPr wrap="square" lIns="27432" rIns="27432" tIns="18288" bIns="18288" anchor="ctr">
-            <a:spAutoFit/>
-          </a:bodyPr>
-          <a:lstStyle/>
-          <a:p>
-            <a:pPr algn="l">
-              <a:spcAft>
-                <a:spcPts val="0"/>
-              </a:spcAft>
-            </a:pPr>
-            <a:r>
-              <a:rPr sz="1150" b="0" i="0">
-                <a:solidFill>
-                  <a:srgbClr val="B4C7D2"/>
-                </a:solidFill>
-                <a:latin typeface="Arial"/>
-              </a:rPr>
-              <a:t>• T₀ → −∇²w restoring load</a:t>
-            </a:r>
-          </a:p>
-        </p:txBody>
-      </p:sp>
-      <p:sp>
-        <p:nvSpPr>
-          <p:cNvPr id="18" name="C4-E05 text 16" descr="sci-ppt:o016"/>
-          <p:cNvSpPr txBox="1"/>
-          <p:nvPr/>
-        </p:nvSpPr>
-        <p:spPr>
-          <a:xfrm>
-            <a:off x="320040" y="4562856"/>
-            <a:ext cx="5715000" cy="246888"/>
-          </a:xfrm>
-          <a:prstGeom prst="rect">
-            <a:avLst/>
-          </a:prstGeom>
-          <a:noFill/>
-          <a:effectLst/>
-        </p:spPr>
-        <p:txBody>
-          <a:bodyPr wrap="square" lIns="27432" rIns="27432" tIns="18288" bIns="18288" anchor="ctr">
-            <a:spAutoFit/>
-          </a:bodyPr>
-          <a:lstStyle/>
-          <a:p>
-            <a:pPr algn="l">
-              <a:spcAft>
-                <a:spcPts val="0"/>
-              </a:spcAft>
-            </a:pPr>
-            <a:r>
-              <a:rPr sz="1150" b="0" i="0">
-                <a:solidFill>
-                  <a:srgbClr val="B4C7D2"/>
-                </a:solidFill>
-                <a:latin typeface="Arial"/>
-              </a:rPr>
-              <a:t>• U_b, U_T — stored energy</a:t>
-            </a:r>
-          </a:p>
-        </p:txBody>
-      </p:sp>
-      <p:sp>
-        <p:nvSpPr>
-          <p:cNvPr id="19" name="C4-E05 text 17" descr="sci-ppt:o017"/>
-          <p:cNvSpPr txBox="1"/>
-          <p:nvPr/>
-        </p:nvSpPr>
-        <p:spPr>
-          <a:xfrm>
-            <a:off x="6217920" y="4562856"/>
-            <a:ext cx="5715000" cy="246888"/>
-          </a:xfrm>
-          <a:prstGeom prst="rect">
-            <a:avLst/>
-          </a:prstGeom>
-          <a:noFill/>
-          <a:effectLst/>
-        </p:spPr>
-        <p:txBody>
-          <a:bodyPr wrap="square" lIns="27432" rIns="27432" tIns="18288" bIns="18288" anchor="ctr">
-            <a:spAutoFit/>
-          </a:bodyPr>
-          <a:lstStyle/>
-          <a:p>
-            <a:pPr algn="l">
-              <a:spcAft>
-                <a:spcPts val="0"/>
-              </a:spcAft>
-            </a:pPr>
-            <a:r>
-              <a:rPr sz="1150" b="0" i="0">
-                <a:solidFill>
-                  <a:srgbClr val="B4C7D2"/>
-                </a:solidFill>
-                <a:latin typeface="Arial"/>
-              </a:rPr>
-              <a:t>• clamp: δw = 0, slope variation = 0</a:t>
-            </a:r>
-          </a:p>
-        </p:txBody>
-      </p:sp>
-      <p:sp>
-        <p:nvSpPr>
-          <p:cNvPr id="20" name="C4-E05 text 18" descr="sci-ppt:o018"/>
-          <p:cNvSpPr txBox="1"/>
-          <p:nvPr/>
-        </p:nvSpPr>
-        <p:spPr>
-          <a:xfrm>
-            <a:off x="320040" y="5596128"/>
-            <a:ext cx="11430000" cy="292608"/>
-          </a:xfrm>
-          <a:prstGeom prst="rect">
-            <a:avLst/>
-          </a:prstGeom>
-          <a:noFill/>
-          <a:effectLst/>
-        </p:spPr>
-        <p:txBody>
-          <a:bodyPr wrap="square" lIns="27432" rIns="27432" tIns="18288" bIns="18288" anchor="ctr">
+          <a:bodyPr wrap="none" lIns="18288" rIns="18288" tIns="18288" bIns="18288" anchor="t">
             <a:spAutoFit/>
           </a:bodyPr>
           <a:lstStyle/>
@@ -3807,21 +4203,21 @@
                 </a:solidFill>
                 <a:latin typeface="Arial"/>
               </a:rPr>
-              <a:t>Four spatial derivatives arise from two integrations by parts.</a:t>
-            </a:r>
-          </a:p>
-        </p:txBody>
-      </p:sp>
-      <p:sp>
-        <p:nvSpPr>
-          <p:cNvPr id="21" name="C4-E05 text 19" descr="sci-ppt:o019"/>
+              <a:t>2ν + 2(1 − ν) = 2 for every ν</a:t>
+            </a:r>
+          </a:p>
+        </p:txBody>
+      </p:sp>
+      <p:sp>
+        <p:nvSpPr>
+          <p:cNvPr id="31" name="C4-E05 text 29" descr="sci-ppt:o029"/>
           <p:cNvSpPr txBox="1"/>
           <p:nvPr/>
         </p:nvSpPr>
         <p:spPr>
           <a:xfrm>
-            <a:off x="320040" y="6473952"/>
-            <a:ext cx="11430000" cy="256032"/>
+            <a:off x="6400800" y="4023360"/>
+            <a:ext cx="5303520" cy="254889"/>
           </a:xfrm>
           <a:prstGeom prst="rect">
             <a:avLst/>
@@ -3830,7 +4226,103 @@
           <a:effectLst/>
         </p:spPr>
         <p:txBody>
-          <a:bodyPr wrap="square" lIns="27432" rIns="27432" tIns="18288" bIns="18288" anchor="ctr">
+          <a:bodyPr wrap="none" lIns="18288" rIns="18288" tIns="18288" bIns="18288" anchor="t">
+            <a:spAutoFit/>
+          </a:bodyPr>
+          <a:lstStyle/>
+          <a:p>
+            <a:pPr algn="l">
+              <a:spcAft>
+                <a:spcPts val="0"/>
+              </a:spcAft>
+            </a:pPr>
+            <a:r>
+              <a:rPr sz="1350" b="1" i="0">
+                <a:solidFill>
+                  <a:srgbClr val="F2B880"/>
+                </a:solidFill>
+                <a:latin typeface="Arial"/>
+              </a:rPr>
+              <a:t>Result: D_f ∇⁴w − T₀ ∇²w are the elastic restoring terms.</a:t>
+            </a:r>
+          </a:p>
+        </p:txBody>
+      </p:sp>
+      <p:sp>
+        <p:nvSpPr>
+          <p:cNvPr id="32" name="C4-E05 text 30" descr="sci-ppt:o030"/>
+          <p:cNvSpPr txBox="1"/>
+          <p:nvPr/>
+        </p:nvSpPr>
+        <p:spPr>
+          <a:xfrm>
+            <a:off x="6400800" y="4663440"/>
+            <a:ext cx="5303520" cy="433070"/>
+          </a:xfrm>
+          <a:prstGeom prst="rect">
+            <a:avLst/>
+          </a:prstGeom>
+          <a:noFill/>
+          <a:effectLst/>
+        </p:spPr>
+        <p:txBody>
+          <a:bodyPr wrap="none" lIns="18288" rIns="18288" tIns="18288" bIns="18288" anchor="t">
+            <a:spAutoFit/>
+          </a:bodyPr>
+          <a:lstStyle/>
+          <a:p>
+            <a:pPr algn="l">
+              <a:spcAft>
+                <a:spcPts val="0"/>
+              </a:spcAft>
+            </a:pPr>
+            <a:r>
+              <a:rPr sz="1250" b="0" i="0">
+                <a:solidFill>
+                  <a:srgbClr val="E7F0F3"/>
+                </a:solidFill>
+                <a:latin typeface="Arial"/>
+              </a:rPr>
+              <a:t>They are the same terms that enter the transient balance of Eq.</a:t>
+            </a:r>
+          </a:p>
+          <a:p>
+            <a:pPr algn="l">
+              <a:spcAft>
+                <a:spcPts val="0"/>
+              </a:spcAft>
+            </a:pPr>
+            <a:r>
+              <a:rPr sz="1250" b="0" i="0">
+                <a:solidFill>
+                  <a:srgbClr val="E7F0F3"/>
+                </a:solidFill>
+                <a:latin typeface="Arial"/>
+              </a:rPr>
+              <a:t>C4-E06.</a:t>
+            </a:r>
+          </a:p>
+        </p:txBody>
+      </p:sp>
+      <p:sp>
+        <p:nvSpPr>
+          <p:cNvPr id="33" name="C4-E05 text 31" descr="sci-ppt:o031"/>
+          <p:cNvSpPr txBox="1"/>
+          <p:nvPr/>
+        </p:nvSpPr>
+        <p:spPr>
+          <a:xfrm>
+            <a:off x="320040" y="6510528"/>
+            <a:ext cx="11521440" cy="200660"/>
+          </a:xfrm>
+          <a:prstGeom prst="rect">
+            <a:avLst/>
+          </a:prstGeom>
+          <a:noFill/>
+          <a:effectLst/>
+        </p:spPr>
+        <p:txBody>
+          <a:bodyPr wrap="none" lIns="18288" rIns="18288" tIns="18288" bIns="18288" anchor="t">
             <a:spAutoFit/>
           </a:bodyPr>
           <a:lstStyle/>
@@ -3847,7 +4339,7 @@
                 </a:solidFill>
                 <a:latin typeface="Arial"/>
               </a:rPr>
-              <a:t>Model schematic; geometry is not to scale.</a:t>
+              <a:t>Clamped variational identity of Eq. C4-E05.</a:t>
             </a:r>
           </a:p>
         </p:txBody>
